--- a/reports/6g-data-fabric-sections-234-deck.pptx
+++ b/reports/6g-data-fabric-sections-234-deck.pptx
@@ -4195,7 +4195,7 @@
                 <a:latin typeface="WenQuanYi Micro Hei"/>
                 <a:ea typeface="WenQuanYi Micro Hei"/>
               </a:rPr>
-              <a:t>异构发现、近源处理、跨时标交付、语义/QoD、动作证据和外部运营均有真实需求，区别在实现责任与时标，不在名称。</a:t>
+              <a:t>异构发现、近源处理、跨时标交付、语义/任务适用性、动作证据和外部运营均有真实需求，区别在实现责任与时标，不在名称。</a:t>
             </a:r>
           </a:p>
         </p:txBody>
@@ -5065,7 +5065,7 @@
                 <a:latin typeface="WenQuanYi Micro Hei"/>
                 <a:ea typeface="WenQuanYi Micro Hei"/>
               </a:rPr>
-              <a:t>没有中立证据证明任何一家已在多运营商、多厂商环境同时实现公共语义、通信QoD、开放后端和可信动作闭环。</a:t>
+              <a:t>没有中立证据证明任何一家已在多运营商、多厂商环境同时实现公共语义、通信数据适用性、开放后端和可信动作闭环。</a:t>
             </a:r>
           </a:p>
         </p:txBody>
@@ -5299,7 +5299,7 @@
                 <a:latin typeface="WenQuanYi Micro Hei"/>
                 <a:ea typeface="WenQuanYi Micro Hei"/>
               </a:rPr>
-              <a:t>应让网络原生方案、外部编织方案和分时标混合方案，在同一组时延、可靠性、语义、QoD、证据、开放性与TCO指标下竞争。</a:t>
+              <a:t>应让网络原生方案、外部编织方案和分时标混合方案，在同一组时延、可靠性、语义、任务适用性、证据、开放性与TCO指标下竞争。</a:t>
             </a:r>
           </a:p>
         </p:txBody>
@@ -5928,7 +5928,7 @@
                           <a:latin typeface="WenQuanYi Micro Hei"/>
                           <a:ea typeface="WenQuanYi Micro Hei"/>
                         </a:rPr>
-                        <a:t>把数据封装为带消费者、Owner、契约和生命周期的产品，并以面向用途的QoD证明适用边界</a:t>
+                        <a:t>把数据封装为带消费者、Owner、契约和生命周期的产品，并以面向用途的任务适用性证明适用边界</a:t>
                       </a:r>
                     </a:p>
                   </a:txBody>
@@ -5952,7 +5952,7 @@
                           <a:latin typeface="WenQuanYi Micro Hei"/>
                           <a:ea typeface="WenQuanYi Micro Hei"/>
                         </a:rPr>
-                        <a:t>数据适用  ·  T1 可运营产品  ·  T6 QoD质量信封</a:t>
+                        <a:t>数据适用  ·  T1 可运营产品  ·  T6 任务适用性信封</a:t>
                       </a:r>
                     </a:p>
                   </a:txBody>
@@ -7856,7 +7856,7 @@
                 <a:latin typeface="WenQuanYi Micro Hei"/>
                 <a:ea typeface="WenQuanYi Micro Hei"/>
               </a:rPr>
-              <a:t>领先信号：Schema/配置/QoD/权限变更自动生成影响清单并触发CI或策略检查。反证：目录仍靠人工扫描，事故早于目录发现变化。</a:t>
+              <a:t>领先信号：Schema/配置/任务适用性/权限变更自动生成影响清单并触发CI或策略检查。反证：目录仍靠人工扫描，事故早于目录发现变化。</a:t>
             </a:r>
           </a:p>
         </p:txBody>
@@ -8050,7 +8050,7 @@
                 <a:latin typeface="WenQuanYi Micro Hei"/>
                 <a:ea typeface="WenQuanYi Micro Hei"/>
               </a:rPr>
-              <a:t>全局：对象/语义、QoD模板、产品定义、策略、模型和版本发布。</a:t>
+              <a:t>全局：对象/语义、任务适用性模板、产品定义、策略、模型和版本发布。</a:t>
             </a:r>
           </a:p>
           <a:p>
@@ -8252,7 +8252,7 @@
                           <a:latin typeface="WenQuanYi Micro Hei"/>
                           <a:ea typeface="WenQuanYi Micro Hei"/>
                         </a:rPr>
-                        <a:t>状态可知是T1/T6的前提：后续产品化才有稳定对象可引用，QoD才有来源和时效。</a:t>
+                        <a:t>状态可知是T1/T6的前提：后续产品化才有稳定对象可引用，任务适用性才有来源和时效。</a:t>
                       </a:r>
                     </a:p>
                   </a:txBody>
@@ -8324,7 +8324,7 @@
                           <a:latin typeface="WenQuanYi Micro Hei"/>
                           <a:ea typeface="WenQuanYi Micro Hei"/>
                         </a:rPr>
-                        <a:t>三家都有摄取/近源叙述；跨域事件对账和统一控制均未证明。OpenLineage证明事件可工程化，电信关键是网络对象/配置/QoD作用域  [S27]</a:t>
+                        <a:t>三家都有摄取/近源叙述；跨域事件对账和统一控制均未证明。OpenLineage证明事件可工程化，电信关键是网络对象/配置/任务适用性作用域  [S27]</a:t>
                       </a:r>
                     </a:p>
                   </a:txBody>
@@ -8610,7 +8610,7 @@
                 <a:latin typeface="WenQuanYi Micro Hei"/>
                 <a:ea typeface="WenQuanYi Micro Hei"/>
               </a:rPr>
-              <a:t>T1 可运营数据产品  +  T6 面向特定用途的 QoD</a:t>
+              <a:t>T1 可运营数据产品  +  T6 面向特定用途的任务适用性</a:t>
             </a:r>
           </a:p>
         </p:txBody>
@@ -8675,7 +8675,7 @@
                 <a:latin typeface="WenQuanYi Micro Hei"/>
                 <a:ea typeface="WenQuanYi Micro Hei"/>
               </a:rPr>
-              <a:t>论点  价值单位从「表、Topic、接口和PB」转为「持续满足明确消费者与任务的数据供给」。QoD是面向特定用途的适用性质量信封，不是覆盖所有数据的总分，也不是已冻结的统一3GPP指标。</a:t>
+              <a:t>论点  价值单位从「表、Topic、接口和PB」转为「持续满足明确消费者与任务的数据供给」。任务适用性是面向用途的适用性信封，不是统一总分或3GPP既定指标；QoD仅指CAMARA Quality on Demand API。</a:t>
             </a:r>
           </a:p>
         </p:txBody>
@@ -8849,7 +8849,7 @@
                 <a:latin typeface="WenQuanYi Micro Hei"/>
                 <a:ea typeface="WenQuanYi Micro Hei"/>
               </a:rPr>
-              <a:t>最小完备集：明确消费者与任务、稳定标识和版本、Owner、Schema/语义、QoD、SLO、用途/权限、血缘、成本/计量、保留期及退出。只有目录条目、接口包装或Marketplace页面，仍不是数据产品。</a:t>
+              <a:t>最小完备集：明确消费者与任务、稳定标识和版本、Owner、Schema/语义、任务适用性、SLO、用途/权限、血缘、成本/计量、保留期及退出。只有目录条目、接口包装或Marketplace页面，仍不是数据产品。</a:t>
             </a:r>
           </a:p>
           <a:p>
@@ -8909,7 +8909,7 @@
                 <a:latin typeface="WenQuanYi Micro Hei"/>
                 <a:ea typeface="WenQuanYi Micro Hei"/>
               </a:rPr>
-              <a:t>领先信号：产品契约进入版本基线，生产者和消费者共同签署SLO/QoD。反证：每个场景仍重新采集清洗，产品长期无人消费，Owner与退出机制缺失。</a:t>
+              <a:t>领先信号：产品契约进入版本基线，生产者和消费者共同签署SLO/任务适用性。反证：每个场景仍重新采集清洗，产品长期无人消费，Owner与退出机制缺失。</a:t>
             </a:r>
           </a:p>
         </p:txBody>
@@ -9040,7 +9040,7 @@
                 <a:latin typeface="WenQuanYi Micro Hei"/>
                 <a:ea typeface="WenQuanYi Micro Hei"/>
               </a:rPr>
-              <a:t>T6  QoD成为模型与闭环的准入标准  ·  中高确定性</a:t>
+              <a:t>T6 任务适用性成为模型与闭环的准入标准  ·  中高确定性</a:t>
             </a:r>
           </a:p>
         </p:txBody>
@@ -9083,7 +9083,7 @@
                 <a:latin typeface="WenQuanYi Micro Hei"/>
                 <a:ea typeface="WenQuanYi Micro Hei"/>
               </a:rPr>
-              <a:t>定义：用一组可测试的质量信封说明，数据在何种对象、时空、配置与采样条件下，可以被哪个模型或闭环安全使用。同一KPI在不同小区/频段/波束/配置/采样窗口下不可直接比较。</a:t>
+              <a:t>定义：用一组可测试的适用性信封说明，数据在何种对象、时空、配置与采样条件下，可以被哪个模型或闭环安全使用。同一KPI在不同小区/频段/波束/配置/采样窗口下不可直接比较。</a:t>
             </a:r>
           </a:p>
           <a:p>
@@ -9123,7 +9123,7 @@
                 <a:latin typeface="WenQuanYi Micro Hei"/>
                 <a:ea typeface="WenQuanYi Micro Hei"/>
               </a:rPr>
-              <a:t>领先信号：QoD进入数据契约、模型卡、跨域接口和动作放行条件。反证：仍只统计记录量、接口成功率、完整性，或用一个总分掩盖差异。</a:t>
+              <a:t>领先信号：任务适用性进入数据契约、模型卡、跨域接口和动作放行条件。反证：仍只统计记录量、接口成功率、完整性，或用一个总分掩盖差异。</a:t>
             </a:r>
           </a:p>
           <a:p>
@@ -9882,7 +9882,7 @@
                 <a:latin typeface="WenQuanYi Micro Hei"/>
                 <a:ea typeface="WenQuanYi Micro Hei"/>
               </a:rPr>
-              <a:t>四段：Fabric提供版本化产品、上下文、QoD与策略 → 模型/Agent依据意图选择数据、工具和候选动作 → 执行面按身份、作用域、租约和风险预算动作 → 动作、结果、回滚与漂移写回共同证据图。</a:t>
+              <a:t>四段：Fabric提供版本化产品、上下文、任务适用性与策略 → 模型/Agent依据意图选择数据、工具和候选动作 → 执行面按身份、作用域、租约和风险预算动作 → 动作、结果、回滚与漂移写回共同证据图。</a:t>
             </a:r>
           </a:p>
           <a:p>
@@ -10116,7 +10116,7 @@
                 <a:latin typeface="WenQuanYi Micro Hei"/>
                 <a:ea typeface="WenQuanYi Micro Hei"/>
               </a:rPr>
-              <a:t>关系：Data Fabric向NDT提供带时间、配置、QoD与血缘的版本化状态快照；NDT对候选动作做反事实预演并输出收益、冲突和副作用；策略引擎据此放行、灰度或拒绝；生产结果再回流校准。NDT是证据链中的消费者和生产者，不是Fabric同义词。</a:t>
+              <a:t>关系：Data Fabric向NDT提供带时间、配置、任务适用性与血缘的版本化状态快照；NDT对候选动作做反事实预演并输出收益、冲突和副作用；策略引擎据此放行、灰度或拒绝；生产结果再回流校准。NDT是证据链中的消费者和生产者，不是Fabric同义词。</a:t>
             </a:r>
           </a:p>
           <a:p>
@@ -10915,7 +10915,7 @@
                 <a:latin typeface="WenQuanYi Micro Hei"/>
                 <a:ea typeface="WenQuanYi Micro Hei"/>
               </a:rPr>
-              <a:t>供给：带语义、QoD、用途和成本的数据/分析产品。买方：网络产品线、运维、AI和API团队。价值：复用、降本、缩短交付。</a:t>
+              <a:t>供给：带语义、任务适用性、用途和成本的数据/分析产品。买方：网络产品线、运维、AI和API团队。价值：复用、降本、缩短交付。</a:t>
             </a:r>
           </a:p>
         </p:txBody>
@@ -11089,7 +11089,7 @@
                 <a:latin typeface="WenQuanYi Micro Hei"/>
                 <a:ea typeface="WenQuanYi Micro Hei"/>
               </a:rPr>
-              <a:t>供给：QoD、位置、身份、状态或分析服务。买方：行业平台、应用与CPaaS。价值：SLA、调用/会话收费。</a:t>
+              <a:t>供给：Quality on Demand（QoD）、位置、身份、状态或分析服务。买方：行业平台、应用与CPaaS。价值：SLA、调用/会话收费。</a:t>
             </a:r>
           </a:p>
         </p:txBody>
@@ -11928,7 +11928,7 @@
                 <a:latin typeface="WenQuanYi Micro Hei"/>
                 <a:ea typeface="WenQuanYi Micro Hei"/>
               </a:rPr>
-              <a:t>趋势边界：事件化≠全量流事件化；产品化≠上架目录；协同闭环≠Agent接管快环；NDT≠安全证明；QoD≠单一总分；商业链≠API数量；能力集合≠标准已放弃新NF。越过这些边界，趋势判断就会退化为营销术语。</a:t>
+              <a:t>趋势边界：事件化≠全量流事件化；产品化≠上架目录；协同闭环≠Agent接管快环；NDT≠安全证明；任务适用性≠单一总分；商业链≠API数量；能力集合≠标准已放弃新NF。越过这些边界，趋势判断就会退化为营销术语。</a:t>
             </a:r>
           </a:p>
           <a:p>
@@ -12289,7 +12289,7 @@
                 <a:latin typeface="WenQuanYi Micro Hei"/>
                 <a:ea typeface="WenQuanYi Micro Hei"/>
               </a:rPr>
-              <a:t>论点  「看透」是把趋势变成可验证、可证伪、可停止的工程命题；「看清」是观察谁掌握语义/QoD、近源运行时、Agent/NDT证据、跨网结算和互操作规则。不猜网元名称，不再另造趋势。</a:t>
+              <a:t>论点  「看透」是把趋势变成可验证、可证伪、可停止的工程命题；「看清」是观察谁掌握语义/任务适用性、近源运行时、Agent/NDT证据、跨网结算和互操作规则。不猜网元名称，不再另造趋势。</a:t>
             </a:r>
           </a:p>
         </p:txBody>
@@ -12455,7 +12455,7 @@
                           <a:latin typeface="WenQuanYi Micro Hei"/>
                           <a:ea typeface="WenQuanYi Micro Hei"/>
                         </a:rPr>
-                        <a:t>故障/节能/移动性/QoE或模型特征中，至少少量产品具有消费者、Owner、Schema、QoD、SLO、用途与退出；同一产品跨第二场景/后端复用</a:t>
+                        <a:t>故障/节能/移动性/QoE或模型特征中，至少少量产品具有消费者、Owner、Schema、任务适用性、SLO、用途与退出；同一产品跨第二场景/后端复用</a:t>
                       </a:r>
                     </a:p>
                   </a:txBody>
@@ -12553,7 +12553,7 @@
                           <a:latin typeface="WenQuanYi Micro Hei"/>
                           <a:ea typeface="WenQuanYi Micro Hei"/>
                         </a:rPr>
-                        <a:t>Schema、配置、拓扑、QoD、权限和血缘变化能触发影响分析、契约测试、缓存/模型失效或审批；同时保留基线快照和周期对账</a:t>
+                        <a:t>Schema、配置、拓扑、任务适用性、权限和血缘变化能触发影响分析、契约测试、缓存/模型失效或审批；同时保留基线快照和周期对账</a:t>
                       </a:r>
                     </a:p>
                   </a:txBody>
@@ -12921,7 +12921,7 @@
                           <a:latin typeface="WenQuanYi Micro Hei"/>
                           <a:ea typeface="WenQuanYi Micro Hei"/>
                         </a:rPr>
-                        <a:t>T6 QoD准入  中高</a:t>
+                        <a:t>T6 任务适用性准入  中高</a:t>
                       </a:r>
                     </a:p>
                   </a:txBody>
@@ -12945,7 +12945,7 @@
                           <a:latin typeface="WenQuanYi Micro Hei"/>
                           <a:ea typeface="WenQuanYi Micro Hei"/>
                         </a:rPr>
-                        <a:t>按数据族形成质量信封并进入数据契约、模型卡或接口；至少覆盖采样代表性、时空覆盖、同步/配置一致、测量置信及训练—服务偏差</a:t>
+                        <a:t>按数据族形成适用性信封并进入数据契约、模型卡或接口；至少覆盖采样代表性、时空覆盖、同步/配置一致、测量置信及训练—服务偏差</a:t>
                       </a:r>
                     </a:p>
                   </a:txBody>
@@ -12969,7 +12969,7 @@
                           <a:latin typeface="WenQuanYi Micro Hei"/>
                           <a:ea typeface="WenQuanYi Micro Hei"/>
                         </a:rPr>
-                        <a:t>不同数据族的质量信封收敛公共属性并进入互操作测试；QoD成为模型、闭环和跨域产品的共同验收语言</a:t>
+                        <a:t>不同数据族的适用性信封收敛公共属性并进入互操作测试；任务适用性成为模型、闭环和跨域产品的共同验收语言</a:t>
                       </a:r>
                     </a:p>
                   </a:txBody>
@@ -13141,7 +13141,7 @@
                           <a:latin typeface="WenQuanYi Micro Hei"/>
                           <a:ea typeface="WenQuanYi Micro Hei"/>
                         </a:rPr>
-                        <a:t>Rel-21讨论开始收敛发现、处理、存储、暴露、QoD和生命周期等能力及接口；产品原型证明可插拔后端与多种部署映射</a:t>
+                        <a:t>Rel-21讨论开始收敛发现、处理、存储、暴露、数据质量/适用性属性和生命周期等能力及接口；产品原型证明可插拔后端与多种部署映射</a:t>
                       </a:r>
                     </a:p>
                   </a:txBody>
@@ -13262,7 +13262,7 @@
                 <a:latin typeface="WenQuanYi Micro Hei"/>
                 <a:ea typeface="WenQuanYi Micro Hei"/>
               </a:rPr>
-              <a:t>3–5年决策：看谁拥有控制点。设备商的稳定优势在网络语义、QoD和近源执行；云/数据平台在模型、Catalog与开发工具；聚合商在分发与结算。运营商将要求对象、策略、证据可导出，运行时和后端可替换。</a:t>
+              <a:t>3–5年决策：看谁拥有控制点。设备商的稳定优势在网络语义、任务适用性和近源执行；云/数据平台在模型、Catalog与开发工具；聚合商在分发与结算。运营商将要求对象、策略、证据可导出，运行时和后端可替换。</a:t>
             </a:r>
           </a:p>
           <a:p>
@@ -13282,7 +13282,7 @@
                 <a:latin typeface="WenQuanYi Micro Hei"/>
                 <a:ea typeface="WenQuanYi Micro Hei"/>
               </a:rPr>
-              <a:t>收束：3年让每条趋势都有可验证、可停止的证据；5年看清谁拥有语义/QoD、近源运行、动作证据、标准接口与跨网结算。投射基于截至2026-08的公开材料，不等于3GPP已采纳，也不构成厂商产品承诺。</a:t>
+              <a:t>收束：3年让每条趋势都有可验证、可停止的证据；5年看清谁拥有语义/任务适用性、近源运行、动作证据、标准接口与跨网结算。投射基于截至2026-08的公开材料，不等于3GPP已采纳，也不构成厂商产品承诺。</a:t>
             </a:r>
           </a:p>
         </p:txBody>
@@ -13752,7 +13752,7 @@
                 <a:latin typeface="WenQuanYi Micro Hei"/>
                 <a:ea typeface="WenQuanYi Micro Hei"/>
               </a:rPr>
-              <a:t>只投射第3章 T1–T8。3年看透不变量能否被合同、接口和证据固定；5年看清谁拥有语义/QoD、近源运行时、动作证据和跨网结算控制点。不再另造趋势。</a:t>
+              <a:t>只投射第3章 T1–T8。3年看透不变量能否被合同、接口和证据固定；5年看清谁拥有语义/任务适用性、近源运行时、动作证据和跨网结算控制点。不再另造趋势。</a:t>
             </a:r>
           </a:p>
         </p:txBody>
@@ -16227,7 +16227,7 @@
                 <a:latin typeface="WenQuanYi Micro Hei"/>
                 <a:ea typeface="WenQuanYi Micro Hei"/>
               </a:rPr>
-              <a:t>论点  待验证的是共同外部行为，不是再加统一名称。更有把握冻结角色、稳定标识、最小元数据、交付外部行为，并与 QoD/授权/证据挂钩。Kafka、湖仓、完整 KG、独立 Fabric 或专用 Data Plane 都仍是未收敛实现选择。</a:t>
+              <a:t>论点  待验证的是共同外部行为，不是再加统一名称。更有把握冻结角色、稳定标识、最小元数据、交付外部行为，并与任务适用性/授权/证据挂钩。Kafka、湖仓、完整 KG、独立 Fabric 或专用 Data Plane 都仍是未收敛实现选择。</a:t>
             </a:r>
           </a:p>
         </p:txBody>
@@ -16441,7 +16441,7 @@
                           <a:latin typeface="WenQuanYi Micro Hei"/>
                           <a:ea typeface="WenQuanYi Micro Hei"/>
                         </a:rPr>
-                        <a:t>不能推出QoD、Catalog、血缘或“6G Data Fabric”接口已成为IMT要求  [S1]</a:t>
+                        <a:t>不能推出任务适用性、Catalog、血缘或“6G Data Fabric”接口已成为IMT要求  [S1]</a:t>
                       </a:r>
                     </a:p>
                   </a:txBody>
@@ -16833,7 +16833,7 @@
                           <a:latin typeface="WenQuanYi Micro Hei"/>
                           <a:ea typeface="WenQuanYi Micro Hei"/>
                         </a:rPr>
-                        <a:t>五类接口不是统一语义/QoD/血缘总线；工作项≠最终规范或独立Fabric  [S7][S43]</a:t>
+                        <a:t>五类接口不是统一语义/任务适用性/血缘总线；工作项≠最终规范或独立Fabric  [S7][S43]</a:t>
                       </a:r>
                     </a:p>
                   </a:txBody>
@@ -16931,7 +16931,7 @@
                           <a:latin typeface="WenQuanYi Micro Hei"/>
                           <a:ea typeface="WenQuanYi Micro Hei"/>
                         </a:rPr>
-                        <a:t>不能推出内部采集、QoD生成或无线动作路径已经统一  [S15][S16]</a:t>
+                        <a:t>不能推出内部采集、任务适用性生成或无线动作路径已经统一  [S15][S16]</a:t>
                       </a:r>
                     </a:p>
                   </a:txBody>
@@ -17523,7 +17523,7 @@
                           <a:latin typeface="WenQuanYi Micro Hei"/>
                           <a:ea typeface="WenQuanYi Micro Hei"/>
                         </a:rPr>
-                        <a:t>API一致不代表语义、QoD、责任、用途和计量一致</a:t>
+                        <a:t>API一致不代表语义、任务适用性、责任、用途和计量一致</a:t>
                       </a:r>
                     </a:p>
                   </a:txBody>
@@ -18831,7 +18831,7 @@
                           <a:latin typeface="WenQuanYi Micro Hei"/>
                           <a:ea typeface="WenQuanYi Micro Hei"/>
                         </a:rPr>
-                        <a:t>语义、QoD与血缘</a:t>
+                        <a:t>语义、任务适用性与血缘</a:t>
                       </a:r>
                     </a:p>
                   </a:txBody>
@@ -20590,7 +20590,7 @@
                           <a:latin typeface="WenQuanYi Micro Hei"/>
                           <a:ea typeface="WenQuanYi Micro Hei"/>
                         </a:rPr>
-                        <a:t>参考架构已成为统一SKU；DataOps/EIAP/NWDAF共享同一跨域语义、QoD和证据链；第三方Agent、异构湖仓和跨网API在相同契约下可双向迁移。</a:t>
+                        <a:t>参考架构已成为统一SKU；DataOps/EIAP/NWDAF共享同一跨域语义、任务适用性和证据链；第三方Agent、异构湖仓和跨网API在相同契约下可双向迁移。</a:t>
                       </a:r>
                     </a:p>
                   </a:txBody>
@@ -24488,7 +24488,7 @@
                           <a:latin typeface="WenQuanYi Micro Hei"/>
                           <a:ea typeface="WenQuanYi Micro Hei"/>
                         </a:rPr>
-                        <a:t>适合作为可替换后端；设备商无需重复建设全栈湖仓，但需保留电信语义、QoD和策略接口的控制或可移植性</a:t>
+                        <a:t>适合作为可替换后端；设备商无需重复建设全栈湖仓，但需保留电信语义、任务适用性和策略接口的控制或可移植性</a:t>
                       </a:r>
                     </a:p>
                   </a:txBody>
@@ -24586,7 +24586,7 @@
                           <a:latin typeface="WenQuanYi Micro Hei"/>
                           <a:ea typeface="WenQuanYi Micro Hei"/>
                         </a:rPr>
-                        <a:t>不应反向定义内部数据采集、QoD生成和动作执行实现</a:t>
+                        <a:t>不应反向定义内部数据采集、任务适用性生成和动作执行实现</a:t>
                       </a:r>
                     </a:p>
                   </a:txBody>

--- a/reports/6g-data-fabric-sections-234-deck.pptx
+++ b/reports/6g-data-fabric-sections-234-deck.pptx
@@ -6124,7 +6124,7 @@
                           <a:latin typeface="WenQuanYi Micro Hei"/>
                           <a:ea typeface="WenQuanYi Micro Hei"/>
                         </a:rPr>
-                        <a:t>先形成内部可信产品，再经标准服务、跨网分发和行业结果逐层传递价值并完成结算</a:t>
+                        <a:t>按责任边界区分可组合能力与结果承诺，分别定义控制权、合同、计价、风险和验收</a:t>
                       </a:r>
                     </a:p>
                   </a:txBody>
@@ -6148,7 +6148,7 @@
                           <a:latin typeface="WenQuanYi Micro Hei"/>
                           <a:ea typeface="WenQuanYi Micro Hei"/>
                         </a:rPr>
-                        <a:t>价值可结算  ·  T7 四层商业链</a:t>
+                        <a:t>价值可结算  ·  T7 责任边界双路径</a:t>
                       </a:r>
                     </a:p>
                   </a:txBody>
@@ -7261,7 +7261,7 @@
                 <a:latin typeface="WenQuanYi Micro Hei"/>
                 <a:ea typeface="WenQuanYi Micro Hei"/>
               </a:rPr>
-              <a:t>因果阅读：T2/T3 → T1/T6 → T4/T5 → T7。没有前一层，后一层不能靠产品命名越级成立。厂商只作外部校验，不替代第一性原理。</a:t>
+              <a:t>依赖阅读：T2/T3与T1/T6形成可信供给底座，T7-A能力服务可据此先行；只有承诺网络动作和业务结果的T7-B，才额外依赖T4/T5。厂商只作外部校验。</a:t>
             </a:r>
           </a:p>
         </p:txBody>
@@ -9333,7 +9333,7 @@
                           <a:latin typeface="WenQuanYi Micro Hei"/>
                           <a:ea typeface="WenQuanYi Micro Hei"/>
                         </a:rPr>
-                        <a:t>T4/T5会把不合格数据送进闭环，T7的外部服务会卖出不可负责的结果。</a:t>
+                        <a:t>T4/T5会把不合格数据送进闭环，使T7-B结果承诺失去责任基础；T7-A仍可在稳定产品和能力SLA下先行。</a:t>
                       </a:r>
                     </a:p>
                   </a:txBody>
@@ -10318,7 +10318,7 @@
                           <a:latin typeface="WenQuanYi Micro Hei"/>
                           <a:ea typeface="WenQuanYi Micro Hei"/>
                         </a:rPr>
-                        <a:t>行动可信是T7的前提：才有资格把闭环结果卖给外部；标准才有动作证据可测。</a:t>
+                        <a:t>行动可信是T7-B结果服务的前提：才有资格承诺闭环结果；T7-A能力服务不必等待高风险自动化成熟。</a:t>
                       </a:r>
                     </a:p>
                   </a:txBody>
@@ -10676,7 +10676,7 @@
                 <a:latin typeface="WenQuanYi Micro Hei"/>
                 <a:ea typeface="WenQuanYi Micro Hei"/>
               </a:rPr>
-              <a:t>T7 四层商业链成立的前提，是前三关口已经可验证</a:t>
+              <a:t>T7沿责任边界分化：能力服务卖输入，结果服务承担输出责任</a:t>
             </a:r>
           </a:p>
         </p:txBody>
@@ -10741,7 +10741,7 @@
                 <a:latin typeface="WenQuanYi Micro Hei"/>
                 <a:ea typeface="WenQuanYi Micro Hei"/>
               </a:rPr>
-              <a:t>论点  之所以称为商业链，不是因为多了API，而是每层都有不同生产者、购买者、成本、责任与结算对象。T8：T1–T7的需求会留下，承载它们的拓扑、组件边界和名称未必统一。</a:t>
+              <a:t>论点  分叉点不是数据形态，而是决策权、动作权和结果责任由谁承担。稳定产品只决定能否履约；客户集成能力、责任转移意愿与可归因性决定走向哪条路径。T8继续横切承载方式。</a:t>
             </a:r>
           </a:p>
         </p:txBody>
@@ -10755,7 +10755,7 @@
         <p:spPr>
           <a:xfrm>
             <a:off x="347472" y="1280160"/>
-            <a:ext cx="2788920" cy="1572768"/>
+            <a:ext cx="5715000" cy="1572768"/>
           </a:xfrm>
           <a:prstGeom prst="roundRect">
             <a:avLst/>
@@ -10843,7 +10843,7 @@
         <p:spPr>
           <a:xfrm>
             <a:off x="493776" y="1335024"/>
-            <a:ext cx="2569464" cy="256032"/>
+            <a:ext cx="5495544" cy="256032"/>
           </a:xfrm>
           <a:prstGeom prst="rect">
             <a:avLst/>
@@ -10872,7 +10872,7 @@
                 <a:latin typeface="WenQuanYi Micro Hei"/>
                 <a:ea typeface="WenQuanYi Micro Hei"/>
               </a:rPr>
-              <a:t>① 内部可信生产</a:t>
+              <a:t>路径A  能力型服务  ·  中高确定性</a:t>
             </a:r>
           </a:p>
         </p:txBody>
@@ -10886,7 +10886,7 @@
         <p:spPr>
           <a:xfrm>
             <a:off x="493776" y="1591056"/>
-            <a:ext cx="2569464" cy="1207008"/>
+            <a:ext cx="5495544" cy="1207008"/>
           </a:xfrm>
           <a:prstGeom prst="rect">
             <a:avLst/>
@@ -10915,7 +10915,27 @@
                 <a:latin typeface="WenQuanYi Micro Hei"/>
                 <a:ea typeface="WenQuanYi Micro Hei"/>
               </a:rPr>
-              <a:t>供给：带语义、任务适用性、用途和成本的数据/分析产品。买方：网络产品线、运维、AI和API团队。价值：复用、降本、缩短交付。</a:t>
+              <a:t>买方保留决策和动作权；供应方保证接口、能力行为与SLA。供给Quality on Demand（QoD）、位置、身份、状态、分析或网络能力。</a:t>
+            </a:r>
+          </a:p>
+          <a:p>
+            <a:pPr algn="l">
+              <a:lnSpc>
+                <a:spcPct val="105000"/>
+              </a:lnSpc>
+              <a:spcAft>
+                <a:spcPts val="200"/>
+              </a:spcAft>
+            </a:pPr>
+            <a:r>
+              <a:rPr sz="1000" b="0">
+                <a:solidFill>
+                  <a:srgbClr val="2C3E50"/>
+                </a:solidFill>
+                <a:latin typeface="WenQuanYi Micro Hei"/>
+                <a:ea typeface="WenQuanYi Micro Hei"/>
+              </a:rPr>
+              <a:t>经聚合层解决跨网覆盖、认证、用量和结算；按调用、会话、覆盖、用量或订阅收费。接口越标准，规模越大但差异化下降。</a:t>
             </a:r>
           </a:p>
         </p:txBody>
@@ -10928,8 +10948,8 @@
         </p:nvSpPr>
         <p:spPr>
           <a:xfrm>
-            <a:off x="3273552" y="1280160"/>
-            <a:ext cx="2788920" cy="1572768"/>
+            <a:off x="6199632" y="1280160"/>
+            <a:ext cx="5623560" cy="1572768"/>
           </a:xfrm>
           <a:prstGeom prst="roundRect">
             <a:avLst/>
@@ -10973,14 +10993,14 @@
         </p:nvSpPr>
         <p:spPr>
           <a:xfrm>
-            <a:off x="3273552" y="1280160"/>
+            <a:off x="6199632" y="1280160"/>
             <a:ext cx="64008" cy="1572768"/>
           </a:xfrm>
           <a:prstGeom prst="rect">
             <a:avLst/>
           </a:prstGeom>
           <a:solidFill>
-            <a:srgbClr val="0E7C7B"/>
+            <a:srgbClr val="B8860B"/>
           </a:solidFill>
           <a:ln>
             <a:noFill/>
@@ -11016,8 +11036,8 @@
         </p:nvSpPr>
         <p:spPr>
           <a:xfrm>
-            <a:off x="3419856" y="1335024"/>
-            <a:ext cx="2569464" cy="256032"/>
+            <a:off x="6345936" y="1335024"/>
+            <a:ext cx="5404104" cy="256032"/>
           </a:xfrm>
           <a:prstGeom prst="rect">
             <a:avLst/>
@@ -11046,7 +11066,7 @@
                 <a:latin typeface="WenQuanYi Micro Hei"/>
                 <a:ea typeface="WenQuanYi Micro Hei"/>
               </a:rPr>
-              <a:t>② 标准服务包装</a:t>
+              <a:t>路径B  结果型托管/自治服务  ·  低—中确定性</a:t>
             </a:r>
           </a:p>
         </p:txBody>
@@ -11059,8 +11079,8 @@
         </p:nvSpPr>
         <p:spPr>
           <a:xfrm>
-            <a:off x="3419856" y="1591056"/>
-            <a:ext cx="2569464" cy="1207008"/>
+            <a:off x="6345936" y="1591056"/>
+            <a:ext cx="5404104" cy="1207008"/>
           </a:xfrm>
           <a:prstGeom prst="rect">
             <a:avLst/>
@@ -11089,7 +11109,27 @@
                 <a:latin typeface="WenQuanYi Micro Hei"/>
                 <a:ea typeface="WenQuanYi Micro Hei"/>
               </a:rPr>
-              <a:t>供给：Quality on Demand（QoD）、位置、身份、状态或分析服务。买方：行业平台、应用与CPaaS。价值：SLA、调用/会话收费。</a:t>
+              <a:t>供应方参与决策和动作，并承诺体验、成功率、节能或风险改善；客户购买效果和责任转移，而不是单项接口。</a:t>
+            </a:r>
+          </a:p>
+          <a:p>
+            <a:pPr algn="l">
+              <a:lnSpc>
+                <a:spcPct val="105000"/>
+              </a:lnSpc>
+              <a:spcAft>
+                <a:spcPts val="200"/>
+              </a:spcAft>
+            </a:pPr>
+            <a:r>
+              <a:rPr sz="1000" b="0">
+                <a:solidFill>
+                  <a:srgbClr val="2C3E50"/>
+                </a:solidFill>
+                <a:latin typeface="WenQuanYi Micro Hei"/>
+                <a:ea typeface="WenQuanYi Micro Hei"/>
+              </a:rPr>
+              <a:t>需要T4/T5、结果基线、归因、授权、风险上限和回滚；按托管费、效果增益、风险降低或结果分成，只能在边界清晰场景扩张。</a:t>
             </a:r>
           </a:p>
         </p:txBody>
@@ -11102,8 +11142,8 @@
         </p:nvSpPr>
         <p:spPr>
           <a:xfrm>
-            <a:off x="6199632" y="1280160"/>
-            <a:ext cx="2788920" cy="1572768"/>
+            <a:off x="347472" y="2944368"/>
+            <a:ext cx="5715000" cy="1965960"/>
           </a:xfrm>
           <a:prstGeom prst="roundRect">
             <a:avLst/>
@@ -11147,14 +11187,14 @@
         </p:nvSpPr>
         <p:spPr>
           <a:xfrm>
-            <a:off x="6199632" y="1280160"/>
-            <a:ext cx="64008" cy="1572768"/>
+            <a:off x="347472" y="2944368"/>
+            <a:ext cx="64008" cy="1965960"/>
           </a:xfrm>
           <a:prstGeom prst="rect">
             <a:avLst/>
           </a:prstGeom>
           <a:solidFill>
-            <a:srgbClr val="B8860B"/>
+            <a:srgbClr val="0E7C7B"/>
           </a:solidFill>
           <a:ln>
             <a:noFill/>
@@ -11190,8 +11230,8 @@
         </p:nvSpPr>
         <p:spPr>
           <a:xfrm>
-            <a:off x="6345936" y="1335024"/>
-            <a:ext cx="2569464" cy="256032"/>
+            <a:off x="493776" y="2999232"/>
+            <a:ext cx="5495544" cy="256032"/>
           </a:xfrm>
           <a:prstGeom prst="rect">
             <a:avLst/>
@@ -11220,7 +11260,7 @@
                 <a:latin typeface="WenQuanYi Micro Hei"/>
                 <a:ea typeface="WenQuanYi Micro Hei"/>
               </a:rPr>
-              <a:t>③ 跨运营商分发</a:t>
+              <a:t>T7分化机制  ·  两条路径长期并存</a:t>
             </a:r>
           </a:p>
         </p:txBody>
@@ -11233,8 +11273,8 @@
         </p:nvSpPr>
         <p:spPr>
           <a:xfrm>
-            <a:off x="6345936" y="1591056"/>
-            <a:ext cx="2569464" cy="1207008"/>
+            <a:off x="493776" y="3255264"/>
+            <a:ext cx="5495544" cy="1600200"/>
           </a:xfrm>
           <a:prstGeom prst="rect">
             <a:avLst/>
@@ -11263,7 +11303,47 @@
                 <a:latin typeface="WenQuanYi Micro Hei"/>
                 <a:ea typeface="WenQuanYi Micro Hei"/>
               </a:rPr>
-              <a:t>供给：一致目录、认证、覆盖、用量和清结算。买方：需要全国/多国覆盖的开发者。价值：渠道佣金、收入分成。</a:t>
+              <a:t>有集成能力的买方希望自行组合输入并保留控制权，形成A；缺少持续运营能力、希望转移责任的客户购买结果，形成B。</a:t>
+            </a:r>
+          </a:p>
+          <a:p>
+            <a:pPr algn="l">
+              <a:lnSpc>
+                <a:spcPct val="105000"/>
+              </a:lnSpc>
+              <a:spcAft>
+                <a:spcPts val="200"/>
+              </a:spcAft>
+            </a:pPr>
+            <a:r>
+              <a:rPr sz="1000" b="0">
+                <a:solidFill>
+                  <a:srgbClr val="2C3E50"/>
+                </a:solidFill>
+                <a:latin typeface="WenQuanYi Micro Hei"/>
+                <a:ea typeface="WenQuanYi Micro Hei"/>
+              </a:rPr>
+              <a:t>A标准化后易复制但议价下降，推动供应方向B延伸；B受归因、授权和责任约束，难完全标准化。两者不是简单成熟度先后。</a:t>
+            </a:r>
+          </a:p>
+          <a:p>
+            <a:pPr algn="l">
+              <a:lnSpc>
+                <a:spcPct val="105000"/>
+              </a:lnSpc>
+              <a:spcAft>
+                <a:spcPts val="200"/>
+              </a:spcAft>
+            </a:pPr>
+            <a:r>
+              <a:rPr sz="1000" b="0">
+                <a:solidFill>
+                  <a:srgbClr val="2C3E50"/>
+                </a:solidFill>
+                <a:latin typeface="WenQuanYi Micro Hei"/>
+                <a:ea typeface="WenQuanYi Micro Hei"/>
+              </a:rPr>
+              <a:t>A验证持续付费、跨网结算和续费；B验证结果基线、归因置信、误动作、风险、争议和回滚成本。两条路径必须分开核算。</a:t>
             </a:r>
           </a:p>
         </p:txBody>
@@ -11276,8 +11356,8 @@
         </p:nvSpPr>
         <p:spPr>
           <a:xfrm>
-            <a:off x="9125712" y="1280160"/>
-            <a:ext cx="2788920" cy="1572768"/>
+            <a:off x="6199632" y="2944368"/>
+            <a:ext cx="5623560" cy="1965960"/>
           </a:xfrm>
           <a:prstGeom prst="roundRect">
             <a:avLst/>
@@ -11321,14 +11401,14 @@
         </p:nvSpPr>
         <p:spPr>
           <a:xfrm>
-            <a:off x="9125712" y="1280160"/>
-            <a:ext cx="64008" cy="1572768"/>
+            <a:off x="6199632" y="2944368"/>
+            <a:ext cx="64008" cy="1965960"/>
           </a:xfrm>
           <a:prstGeom prst="rect">
             <a:avLst/>
           </a:prstGeom>
           <a:solidFill>
-            <a:srgbClr val="B8860B"/>
+            <a:srgbClr val="0B1F3A"/>
           </a:solidFill>
           <a:ln>
             <a:noFill/>
@@ -11364,8 +11444,8 @@
         </p:nvSpPr>
         <p:spPr>
           <a:xfrm>
-            <a:off x="9272016" y="1335024"/>
-            <a:ext cx="2569464" cy="256032"/>
+            <a:off x="6345936" y="2999232"/>
+            <a:ext cx="5404104" cy="256032"/>
           </a:xfrm>
           <a:prstGeom prst="rect">
             <a:avLst/>
@@ -11394,7 +11474,7 @@
                 <a:latin typeface="WenQuanYi Micro Hei"/>
                 <a:ea typeface="WenQuanYi Micro Hei"/>
               </a:rPr>
-              <a:t>④ 行业结果结算</a:t>
+              <a:t>T8横切  ·  低—中确定性</a:t>
             </a:r>
           </a:p>
         </p:txBody>
@@ -11407,8 +11487,8 @@
         </p:nvSpPr>
         <p:spPr>
           <a:xfrm>
-            <a:off x="9272016" y="1591056"/>
-            <a:ext cx="2569464" cy="1207008"/>
+            <a:off x="6345936" y="3255264"/>
+            <a:ext cx="5404104" cy="1600200"/>
           </a:xfrm>
           <a:prstGeom prst="rect">
             <a:avLst/>
@@ -11437,120 +11517,9 @@
                 <a:latin typeface="WenQuanYi Micro Hei"/>
                 <a:ea typeface="WenQuanYi Micro Hei"/>
               </a:rPr>
-              <a:t>供给：交易成功、体验改善、风控或运营结果。买方：金融、车联、工业、媒体。价值：按结果或业务量定价。</a:t>
-            </a:r>
-          </a:p>
-        </p:txBody>
-      </p:sp>
-      <p:sp>
-        <p:nvSpPr>
-          <p:cNvPr id="22" name="Rounded Rectangle 21"/>
-          <p:cNvSpPr/>
-          <p:nvPr/>
-        </p:nvSpPr>
-        <p:spPr>
-          <a:xfrm>
-            <a:off x="347472" y="2944368"/>
-            <a:ext cx="5715000" cy="1965960"/>
-          </a:xfrm>
-          <a:prstGeom prst="roundRect">
-            <a:avLst/>
-          </a:prstGeom>
-          <a:solidFill>
-            <a:srgbClr val="FFFFFF"/>
-          </a:solidFill>
-          <a:ln w="9525">
-            <a:solidFill>
-              <a:srgbClr val="C5D0D4"/>
-            </a:solidFill>
-          </a:ln>
-        </p:spPr>
-        <p:style>
-          <a:lnRef idx="1">
-            <a:schemeClr val="accent1"/>
-          </a:lnRef>
-          <a:fillRef idx="3">
-            <a:schemeClr val="accent1"/>
-          </a:fillRef>
-          <a:effectRef idx="2">
-            <a:schemeClr val="accent1"/>
-          </a:effectRef>
-          <a:fontRef idx="minor">
-            <a:schemeClr val="lt1"/>
-          </a:fontRef>
-        </p:style>
-        <p:txBody>
-          <a:bodyPr rtlCol="0" anchor="ctr"/>
-          <a:lstStyle/>
-          <a:p>
-            <a:pPr algn="ctr"/>
-          </a:p>
-        </p:txBody>
-      </p:sp>
-      <p:sp>
-        <p:nvSpPr>
-          <p:cNvPr id="23" name="Rectangle 22"/>
-          <p:cNvSpPr/>
-          <p:nvPr/>
-        </p:nvSpPr>
-        <p:spPr>
-          <a:xfrm>
-            <a:off x="347472" y="2944368"/>
-            <a:ext cx="64008" cy="1965960"/>
-          </a:xfrm>
-          <a:prstGeom prst="rect">
-            <a:avLst/>
-          </a:prstGeom>
-          <a:solidFill>
-            <a:srgbClr val="0E7C7B"/>
-          </a:solidFill>
-          <a:ln>
-            <a:noFill/>
-          </a:ln>
-        </p:spPr>
-        <p:style>
-          <a:lnRef idx="1">
-            <a:schemeClr val="accent1"/>
-          </a:lnRef>
-          <a:fillRef idx="3">
-            <a:schemeClr val="accent1"/>
-          </a:fillRef>
-          <a:effectRef idx="2">
-            <a:schemeClr val="accent1"/>
-          </a:effectRef>
-          <a:fontRef idx="minor">
-            <a:schemeClr val="lt1"/>
-          </a:fontRef>
-        </p:style>
-        <p:txBody>
-          <a:bodyPr rtlCol="0" anchor="ctr"/>
-          <a:lstStyle/>
-          <a:p>
-            <a:pPr algn="ctr"/>
-          </a:p>
-        </p:txBody>
-      </p:sp>
-      <p:sp>
-        <p:nvSpPr>
-          <p:cNvPr id="24" name="TextBox 23"/>
-          <p:cNvSpPr txBox="1"/>
-          <p:nvPr/>
-        </p:nvSpPr>
-        <p:spPr>
-          <a:xfrm>
-            <a:off x="493776" y="2999232"/>
-            <a:ext cx="5495544" cy="256032"/>
-          </a:xfrm>
-          <a:prstGeom prst="rect">
-            <a:avLst/>
-          </a:prstGeom>
-          <a:noFill/>
-        </p:spPr>
-        <p:txBody>
-          <a:bodyPr wrap="square">
-            <a:spAutoFit/>
-          </a:bodyPr>
-          <a:lstStyle/>
+              <a:t>发现、采集、处理、存储、暴露和治理横跨不同域与时标，不同用例不可能共享完全相同的在线流程。标准应优先冻结跨厂商必须一致的外部行为。</a:t>
+            </a:r>
+          </a:p>
           <a:p>
             <a:pPr algn="l">
               <a:lnSpc>
@@ -11561,39 +11530,16 @@
               </a:spcAft>
             </a:pPr>
             <a:r>
-              <a:rPr sz="1200" b="1">
-                <a:solidFill>
-                  <a:srgbClr val="0B1F3A"/>
+              <a:rPr sz="1000" b="0">
+                <a:solidFill>
+                  <a:srgbClr val="2C3E50"/>
                 </a:solidFill>
                 <a:latin typeface="WenQuanYi Micro Hei"/>
                 <a:ea typeface="WenQuanYi Micro Hei"/>
               </a:rPr>
-              <a:t>T7成立条件  ·  中等确定性</a:t>
-            </a:r>
-          </a:p>
-        </p:txBody>
-      </p:sp>
-      <p:sp>
-        <p:nvSpPr>
-          <p:cNvPr id="25" name="TextBox 24"/>
-          <p:cNvSpPr txBox="1"/>
-          <p:nvPr/>
-        </p:nvSpPr>
-        <p:spPr>
-          <a:xfrm>
-            <a:off x="493776" y="3255264"/>
-            <a:ext cx="5495544" cy="1600200"/>
-          </a:xfrm>
-          <a:prstGeom prst="rect">
-            <a:avLst/>
-          </a:prstGeom>
-          <a:noFill/>
-        </p:spPr>
-        <p:txBody>
-          <a:bodyPr wrap="square">
-            <a:spAutoFit/>
-          </a:bodyPr>
-          <a:lstStyle/>
+              <a:t>最稳定的标准对象是能力语义、信息模型、生命周期、接口行为与一致性测试，而非厂商品牌式拓扑。既可增强DCCF/ADRF/NWDAF/MDA，也可部署SMO服务、边缘Agent或新NF。</a:t>
+            </a:r>
+          </a:p>
           <a:p>
             <a:pPr algn="l">
               <a:lnSpc>
@@ -11611,9 +11557,158 @@
                 <a:latin typeface="WenQuanYi Micro Hei"/>
                 <a:ea typeface="WenQuanYi Micro Hei"/>
               </a:rPr>
-              <a:t>外部服务的一致性上限由内部数据产品稳定性决定；单运营商覆盖通常不足以支持规模行业应用；标准API会降低接口稀缺性，价值上移到交易/会话/结果。</a:t>
-            </a:r>
-          </a:p>
+              <a:t>领先信号：Rel-21收敛功能、信息模型与接口，同时允许多种部署拓扑。反证：3GPP明确冻结独立统一数据平面及必选NF和流程。</a:t>
+            </a:r>
+          </a:p>
+        </p:txBody>
+      </p:sp>
+      <p:sp>
+        <p:nvSpPr>
+          <p:cNvPr id="22" name="TextBox 21"/>
+          <p:cNvSpPr txBox="1"/>
+          <p:nvPr/>
+        </p:nvSpPr>
+        <p:spPr>
+          <a:xfrm>
+            <a:off x="347472" y="5010912"/>
+            <a:ext cx="11475720" cy="1353312"/>
+          </a:xfrm>
+          <a:prstGeom prst="rect">
+            <a:avLst/>
+          </a:prstGeom>
+          <a:noFill/>
+        </p:spPr>
+        <p:txBody>
+          <a:bodyPr wrap="square">
+            <a:spAutoFit/>
+          </a:bodyPr>
+          <a:lstStyle/>
+          <a:p>
+            <a:pPr algn="l">
+              <a:lnSpc>
+                <a:spcPct val="108000"/>
+              </a:lnSpc>
+              <a:spcAft>
+                <a:spcPts val="200"/>
+              </a:spcAft>
+            </a:pPr>
+            <a:r>
+              <a:rPr sz="1100" b="0">
+                <a:solidFill>
+                  <a:srgbClr val="2C3E50"/>
+                </a:solidFill>
+                <a:latin typeface="WenQuanYi Micro Hei"/>
+                <a:ea typeface="WenQuanYi Micro Hei"/>
+              </a:rPr>
+              <a:t>产业断言：6G Data Fabric不会以一个“大一统平台”胜出，而会沿「状态可知 → 数据适用 → 行动可信 → 价值可结算」进入网络。架构上表现为统一控制语义与分布式执行，标准上优先收敛可互操作的能力、信息模型、接口和证据。</a:t>
+            </a:r>
+          </a:p>
+          <a:p>
+            <a:pPr algn="l">
+              <a:lnSpc>
+                <a:spcPct val="108000"/>
+              </a:lnSpc>
+              <a:spcAft>
+                <a:spcPts val="200"/>
+              </a:spcAft>
+            </a:pPr>
+            <a:r>
+              <a:rPr sz="1100" b="0">
+                <a:solidFill>
+                  <a:srgbClr val="2C3E50"/>
+                </a:solidFill>
+                <a:latin typeface="WenQuanYi Micro Hei"/>
+                <a:ea typeface="WenQuanYi Micro Hei"/>
+              </a:rPr>
+              <a:t>趋势边界：事件化≠全量流事件化；产品化≠上架目录；协同闭环≠Agent接管快环；NDT≠安全证明；任务适用性≠单一总分；商业链≠API数量；能力集合≠标准已放弃新NF。越过这些边界，趋势判断就会退化为营销术语。</a:t>
+            </a:r>
+          </a:p>
+          <a:p>
+            <a:pPr algn="l">
+              <a:lnSpc>
+                <a:spcPct val="108000"/>
+              </a:lnSpc>
+              <a:spcAft>
+                <a:spcPts val="200"/>
+              </a:spcAft>
+            </a:pPr>
+            <a:r>
+              <a:rPr sz="1100" b="0">
+                <a:solidFill>
+                  <a:srgbClr val="2C3E50"/>
+                </a:solidFill>
+                <a:latin typeface="WenQuanYi Micro Hei"/>
+                <a:ea typeface="WenQuanYi Micro Hei"/>
+              </a:rPr>
+              <a:t>第4章不再新增趋势，只问：这些关口在3年内能否变成可验证事实，在5年内控制点落在谁手里。</a:t>
+            </a:r>
+          </a:p>
+        </p:txBody>
+      </p:sp>
+      <p:sp>
+        <p:nvSpPr>
+          <p:cNvPr id="23" name="Rectangle 22"/>
+          <p:cNvSpPr/>
+          <p:nvPr/>
+        </p:nvSpPr>
+        <p:spPr>
+          <a:xfrm>
+            <a:off x="347472" y="6601968"/>
+            <a:ext cx="11475720" cy="9144"/>
+          </a:xfrm>
+          <a:prstGeom prst="rect">
+            <a:avLst/>
+          </a:prstGeom>
+          <a:solidFill>
+            <a:srgbClr val="C5D0D4"/>
+          </a:solidFill>
+          <a:ln>
+            <a:noFill/>
+          </a:ln>
+        </p:spPr>
+        <p:style>
+          <a:lnRef idx="1">
+            <a:schemeClr val="accent1"/>
+          </a:lnRef>
+          <a:fillRef idx="3">
+            <a:schemeClr val="accent1"/>
+          </a:fillRef>
+          <a:effectRef idx="2">
+            <a:schemeClr val="accent1"/>
+          </a:effectRef>
+          <a:fontRef idx="minor">
+            <a:schemeClr val="lt1"/>
+          </a:fontRef>
+        </p:style>
+        <p:txBody>
+          <a:bodyPr rtlCol="0" anchor="ctr"/>
+          <a:lstStyle/>
+          <a:p>
+            <a:pPr algn="ctr"/>
+          </a:p>
+        </p:txBody>
+      </p:sp>
+      <p:sp>
+        <p:nvSpPr>
+          <p:cNvPr id="24" name="TextBox 23"/>
+          <p:cNvSpPr txBox="1"/>
+          <p:nvPr/>
+        </p:nvSpPr>
+        <p:spPr>
+          <a:xfrm>
+            <a:off x="347472" y="6620256"/>
+            <a:ext cx="8412480" cy="201168"/>
+          </a:xfrm>
+          <a:prstGeom prst="rect">
+            <a:avLst/>
+          </a:prstGeom>
+          <a:noFill/>
+        </p:spPr>
+        <p:txBody>
+          <a:bodyPr wrap="square">
+            <a:spAutoFit/>
+          </a:bodyPr>
+          <a:lstStyle/>
           <a:p>
             <a:pPr algn="l">
               <a:lnSpc>
@@ -11624,409 +11719,6 @@
               </a:spcAft>
             </a:pPr>
             <a:r>
-              <a:rPr sz="1000" b="0">
-                <a:solidFill>
-                  <a:srgbClr val="2C3E50"/>
-                </a:solidFill>
-                <a:latin typeface="WenQuanYi Micro Hei"/>
-                <a:ea typeface="WenQuanYi Micro Hei"/>
-              </a:rPr>
-              <a:t>先产品化内部能力，再映射CAMARA或行业API；不能用API数量倒推内部成熟度。原始感知数据出售不是默认模式。</a:t>
-            </a:r>
-          </a:p>
-          <a:p>
-            <a:pPr algn="l">
-              <a:lnSpc>
-                <a:spcPct val="105000"/>
-              </a:lnSpc>
-              <a:spcAft>
-                <a:spcPts val="200"/>
-              </a:spcAft>
-            </a:pPr>
-            <a:r>
-              <a:rPr sz="1000" b="0">
-                <a:solidFill>
-                  <a:srgbClr val="2C3E50"/>
-                </a:solidFill>
-                <a:latin typeface="WenQuanYi Micro Hei"/>
-                <a:ea typeface="WenQuanYi Micro Hei"/>
-              </a:rPr>
-              <a:t>领先信号：内部产品契约与外部SLA可追溯，Operate API、聚合渠道与用量结算联通。反证：API数量增长但无跨网一致、持续消费者、责任边界和收入。</a:t>
-            </a:r>
-          </a:p>
-        </p:txBody>
-      </p:sp>
-      <p:sp>
-        <p:nvSpPr>
-          <p:cNvPr id="26" name="Rounded Rectangle 25"/>
-          <p:cNvSpPr/>
-          <p:nvPr/>
-        </p:nvSpPr>
-        <p:spPr>
-          <a:xfrm>
-            <a:off x="6199632" y="2944368"/>
-            <a:ext cx="5623560" cy="1965960"/>
-          </a:xfrm>
-          <a:prstGeom prst="roundRect">
-            <a:avLst/>
-          </a:prstGeom>
-          <a:solidFill>
-            <a:srgbClr val="FFFFFF"/>
-          </a:solidFill>
-          <a:ln w="9525">
-            <a:solidFill>
-              <a:srgbClr val="C5D0D4"/>
-            </a:solidFill>
-          </a:ln>
-        </p:spPr>
-        <p:style>
-          <a:lnRef idx="1">
-            <a:schemeClr val="accent1"/>
-          </a:lnRef>
-          <a:fillRef idx="3">
-            <a:schemeClr val="accent1"/>
-          </a:fillRef>
-          <a:effectRef idx="2">
-            <a:schemeClr val="accent1"/>
-          </a:effectRef>
-          <a:fontRef idx="minor">
-            <a:schemeClr val="lt1"/>
-          </a:fontRef>
-        </p:style>
-        <p:txBody>
-          <a:bodyPr rtlCol="0" anchor="ctr"/>
-          <a:lstStyle/>
-          <a:p>
-            <a:pPr algn="ctr"/>
-          </a:p>
-        </p:txBody>
-      </p:sp>
-      <p:sp>
-        <p:nvSpPr>
-          <p:cNvPr id="27" name="Rectangle 26"/>
-          <p:cNvSpPr/>
-          <p:nvPr/>
-        </p:nvSpPr>
-        <p:spPr>
-          <a:xfrm>
-            <a:off x="6199632" y="2944368"/>
-            <a:ext cx="64008" cy="1965960"/>
-          </a:xfrm>
-          <a:prstGeom prst="rect">
-            <a:avLst/>
-          </a:prstGeom>
-          <a:solidFill>
-            <a:srgbClr val="0B1F3A"/>
-          </a:solidFill>
-          <a:ln>
-            <a:noFill/>
-          </a:ln>
-        </p:spPr>
-        <p:style>
-          <a:lnRef idx="1">
-            <a:schemeClr val="accent1"/>
-          </a:lnRef>
-          <a:fillRef idx="3">
-            <a:schemeClr val="accent1"/>
-          </a:fillRef>
-          <a:effectRef idx="2">
-            <a:schemeClr val="accent1"/>
-          </a:effectRef>
-          <a:fontRef idx="minor">
-            <a:schemeClr val="lt1"/>
-          </a:fontRef>
-        </p:style>
-        <p:txBody>
-          <a:bodyPr rtlCol="0" anchor="ctr"/>
-          <a:lstStyle/>
-          <a:p>
-            <a:pPr algn="ctr"/>
-          </a:p>
-        </p:txBody>
-      </p:sp>
-      <p:sp>
-        <p:nvSpPr>
-          <p:cNvPr id="28" name="TextBox 27"/>
-          <p:cNvSpPr txBox="1"/>
-          <p:nvPr/>
-        </p:nvSpPr>
-        <p:spPr>
-          <a:xfrm>
-            <a:off x="6345936" y="2999232"/>
-            <a:ext cx="5404104" cy="256032"/>
-          </a:xfrm>
-          <a:prstGeom prst="rect">
-            <a:avLst/>
-          </a:prstGeom>
-          <a:noFill/>
-        </p:spPr>
-        <p:txBody>
-          <a:bodyPr wrap="square">
-            <a:spAutoFit/>
-          </a:bodyPr>
-          <a:lstStyle/>
-          <a:p>
-            <a:pPr algn="l">
-              <a:lnSpc>
-                <a:spcPct val="105000"/>
-              </a:lnSpc>
-              <a:spcAft>
-                <a:spcPts val="200"/>
-              </a:spcAft>
-            </a:pPr>
-            <a:r>
-              <a:rPr sz="1200" b="1">
-                <a:solidFill>
-                  <a:srgbClr val="0B1F3A"/>
-                </a:solidFill>
-                <a:latin typeface="WenQuanYi Micro Hei"/>
-                <a:ea typeface="WenQuanYi Micro Hei"/>
-              </a:rPr>
-              <a:t>T8横切  ·  低—中确定性</a:t>
-            </a:r>
-          </a:p>
-        </p:txBody>
-      </p:sp>
-      <p:sp>
-        <p:nvSpPr>
-          <p:cNvPr id="29" name="TextBox 28"/>
-          <p:cNvSpPr txBox="1"/>
-          <p:nvPr/>
-        </p:nvSpPr>
-        <p:spPr>
-          <a:xfrm>
-            <a:off x="6345936" y="3255264"/>
-            <a:ext cx="5404104" cy="1600200"/>
-          </a:xfrm>
-          <a:prstGeom prst="rect">
-            <a:avLst/>
-          </a:prstGeom>
-          <a:noFill/>
-        </p:spPr>
-        <p:txBody>
-          <a:bodyPr wrap="square">
-            <a:spAutoFit/>
-          </a:bodyPr>
-          <a:lstStyle/>
-          <a:p>
-            <a:pPr algn="l">
-              <a:lnSpc>
-                <a:spcPct val="105000"/>
-              </a:lnSpc>
-              <a:spcAft>
-                <a:spcPts val="200"/>
-              </a:spcAft>
-            </a:pPr>
-            <a:r>
-              <a:rPr sz="1000" b="0">
-                <a:solidFill>
-                  <a:srgbClr val="2C3E50"/>
-                </a:solidFill>
-                <a:latin typeface="WenQuanYi Micro Hei"/>
-                <a:ea typeface="WenQuanYi Micro Hei"/>
-              </a:rPr>
-              <a:t>发现、采集、处理、存储、暴露和治理横跨不同域与时标，不同用例不可能共享完全相同的在线流程。标准应优先冻结跨厂商必须一致的外部行为。</a:t>
-            </a:r>
-          </a:p>
-          <a:p>
-            <a:pPr algn="l">
-              <a:lnSpc>
-                <a:spcPct val="105000"/>
-              </a:lnSpc>
-              <a:spcAft>
-                <a:spcPts val="200"/>
-              </a:spcAft>
-            </a:pPr>
-            <a:r>
-              <a:rPr sz="1000" b="0">
-                <a:solidFill>
-                  <a:srgbClr val="2C3E50"/>
-                </a:solidFill>
-                <a:latin typeface="WenQuanYi Micro Hei"/>
-                <a:ea typeface="WenQuanYi Micro Hei"/>
-              </a:rPr>
-              <a:t>最稳定的标准对象是能力语义、信息模型、生命周期、接口行为与一致性测试，而非厂商品牌式拓扑。既可增强DCCF/ADRF/NWDAF/MDA，也可部署SMO服务、边缘Agent或新NF。</a:t>
-            </a:r>
-          </a:p>
-          <a:p>
-            <a:pPr algn="l">
-              <a:lnSpc>
-                <a:spcPct val="105000"/>
-              </a:lnSpc>
-              <a:spcAft>
-                <a:spcPts val="200"/>
-              </a:spcAft>
-            </a:pPr>
-            <a:r>
-              <a:rPr sz="1000" b="0">
-                <a:solidFill>
-                  <a:srgbClr val="2C3E50"/>
-                </a:solidFill>
-                <a:latin typeface="WenQuanYi Micro Hei"/>
-                <a:ea typeface="WenQuanYi Micro Hei"/>
-              </a:rPr>
-              <a:t>领先信号：Rel-21收敛功能、信息模型与接口，同时允许多种部署拓扑。反证：3GPP明确冻结独立统一数据平面及必选NF和流程。</a:t>
-            </a:r>
-          </a:p>
-        </p:txBody>
-      </p:sp>
-      <p:sp>
-        <p:nvSpPr>
-          <p:cNvPr id="30" name="TextBox 29"/>
-          <p:cNvSpPr txBox="1"/>
-          <p:nvPr/>
-        </p:nvSpPr>
-        <p:spPr>
-          <a:xfrm>
-            <a:off x="347472" y="5010912"/>
-            <a:ext cx="11475720" cy="1353312"/>
-          </a:xfrm>
-          <a:prstGeom prst="rect">
-            <a:avLst/>
-          </a:prstGeom>
-          <a:noFill/>
-        </p:spPr>
-        <p:txBody>
-          <a:bodyPr wrap="square">
-            <a:spAutoFit/>
-          </a:bodyPr>
-          <a:lstStyle/>
-          <a:p>
-            <a:pPr algn="l">
-              <a:lnSpc>
-                <a:spcPct val="108000"/>
-              </a:lnSpc>
-              <a:spcAft>
-                <a:spcPts val="200"/>
-              </a:spcAft>
-            </a:pPr>
-            <a:r>
-              <a:rPr sz="1100" b="0">
-                <a:solidFill>
-                  <a:srgbClr val="2C3E50"/>
-                </a:solidFill>
-                <a:latin typeface="WenQuanYi Micro Hei"/>
-                <a:ea typeface="WenQuanYi Micro Hei"/>
-              </a:rPr>
-              <a:t>产业断言：6G Data Fabric不会以一个“大一统平台”胜出，而会沿「状态可知 → 数据适用 → 行动可信 → 价值可结算」进入网络。架构上表现为统一控制语义与分布式执行，标准上优先收敛可互操作的能力、信息模型、接口和证据。</a:t>
-            </a:r>
-          </a:p>
-          <a:p>
-            <a:pPr algn="l">
-              <a:lnSpc>
-                <a:spcPct val="108000"/>
-              </a:lnSpc>
-              <a:spcAft>
-                <a:spcPts val="200"/>
-              </a:spcAft>
-            </a:pPr>
-            <a:r>
-              <a:rPr sz="1100" b="0">
-                <a:solidFill>
-                  <a:srgbClr val="2C3E50"/>
-                </a:solidFill>
-                <a:latin typeface="WenQuanYi Micro Hei"/>
-                <a:ea typeface="WenQuanYi Micro Hei"/>
-              </a:rPr>
-              <a:t>趋势边界：事件化≠全量流事件化；产品化≠上架目录；协同闭环≠Agent接管快环；NDT≠安全证明；任务适用性≠单一总分；商业链≠API数量；能力集合≠标准已放弃新NF。越过这些边界，趋势判断就会退化为营销术语。</a:t>
-            </a:r>
-          </a:p>
-          <a:p>
-            <a:pPr algn="l">
-              <a:lnSpc>
-                <a:spcPct val="108000"/>
-              </a:lnSpc>
-              <a:spcAft>
-                <a:spcPts val="200"/>
-              </a:spcAft>
-            </a:pPr>
-            <a:r>
-              <a:rPr sz="1100" b="0">
-                <a:solidFill>
-                  <a:srgbClr val="2C3E50"/>
-                </a:solidFill>
-                <a:latin typeface="WenQuanYi Micro Hei"/>
-                <a:ea typeface="WenQuanYi Micro Hei"/>
-              </a:rPr>
-              <a:t>第4章不再新增趋势，只问：这些关口在3年内能否变成可验证事实，在5年内控制点落在谁手里。</a:t>
-            </a:r>
-          </a:p>
-        </p:txBody>
-      </p:sp>
-      <p:sp>
-        <p:nvSpPr>
-          <p:cNvPr id="31" name="Rectangle 30"/>
-          <p:cNvSpPr/>
-          <p:nvPr/>
-        </p:nvSpPr>
-        <p:spPr>
-          <a:xfrm>
-            <a:off x="347472" y="6601968"/>
-            <a:ext cx="11475720" cy="9144"/>
-          </a:xfrm>
-          <a:prstGeom prst="rect">
-            <a:avLst/>
-          </a:prstGeom>
-          <a:solidFill>
-            <a:srgbClr val="C5D0D4"/>
-          </a:solidFill>
-          <a:ln>
-            <a:noFill/>
-          </a:ln>
-        </p:spPr>
-        <p:style>
-          <a:lnRef idx="1">
-            <a:schemeClr val="accent1"/>
-          </a:lnRef>
-          <a:fillRef idx="3">
-            <a:schemeClr val="accent1"/>
-          </a:fillRef>
-          <a:effectRef idx="2">
-            <a:schemeClr val="accent1"/>
-          </a:effectRef>
-          <a:fontRef idx="minor">
-            <a:schemeClr val="lt1"/>
-          </a:fontRef>
-        </p:style>
-        <p:txBody>
-          <a:bodyPr rtlCol="0" anchor="ctr"/>
-          <a:lstStyle/>
-          <a:p>
-            <a:pPr algn="ctr"/>
-          </a:p>
-        </p:txBody>
-      </p:sp>
-      <p:sp>
-        <p:nvSpPr>
-          <p:cNvPr id="32" name="TextBox 31"/>
-          <p:cNvSpPr txBox="1"/>
-          <p:nvPr/>
-        </p:nvSpPr>
-        <p:spPr>
-          <a:xfrm>
-            <a:off x="347472" y="6620256"/>
-            <a:ext cx="8412480" cy="201168"/>
-          </a:xfrm>
-          <a:prstGeom prst="rect">
-            <a:avLst/>
-          </a:prstGeom>
-          <a:noFill/>
-        </p:spPr>
-        <p:txBody>
-          <a:bodyPr wrap="square">
-            <a:spAutoFit/>
-          </a:bodyPr>
-          <a:lstStyle/>
-          <a:p>
-            <a:pPr algn="l">
-              <a:lnSpc>
-                <a:spcPct val="105000"/>
-              </a:lnSpc>
-              <a:spcAft>
-                <a:spcPts val="200"/>
-              </a:spcAft>
-            </a:pPr>
-            <a:r>
               <a:rPr sz="900" b="0">
                 <a:solidFill>
                   <a:srgbClr val="5A6A7A"/>
@@ -12041,7 +11733,7 @@
       </p:sp>
       <p:sp>
         <p:nvSpPr>
-          <p:cNvPr id="33" name="TextBox 32"/>
+          <p:cNvPr id="25" name="TextBox 24"/>
           <p:cNvSpPr txBox="1"/>
           <p:nvPr/>
         </p:nvSpPr>
@@ -13019,7 +12711,7 @@
                           <a:latin typeface="WenQuanYi Micro Hei"/>
                           <a:ea typeface="WenQuanYi Micro Hei"/>
                         </a:rPr>
-                        <a:t>T7 商业链  中</a:t>
+                        <a:t>T7 责任双路径  A中高/B低—中</a:t>
                       </a:r>
                     </a:p>
                   </a:txBody>
@@ -13043,7 +12735,7 @@
                           <a:latin typeface="WenQuanYi Micro Hei"/>
                           <a:ea typeface="WenQuanYi Micro Hei"/>
                         </a:rPr>
-                        <a:t>内部产品契约能映射到至少一个标准服务；跨网行为、用量和责任可计量；出现持续付费消费者或明确业务Owner，而非一次性展示</a:t>
+                        <a:t>A：至少一个标准能力出现持续付费、跨网一致和可核算履约成本。B：至少一个场景在合同中明确结果基线、动作权限、归因、责任和回滚</a:t>
                       </a:r>
                     </a:p>
                   </a:txBody>
@@ -13067,7 +12759,7 @@
                           <a:latin typeface="WenQuanYi Micro Hei"/>
                           <a:ea typeface="WenQuanYi Micro Hei"/>
                         </a:rPr>
-                        <a:t>内部生产、标准服务、跨网聚合和行业结果之间分工清晰；部分场景从调用定价走向会话、交易或结果定价</a:t>
+                        <a:t>有集成能力的客户购买可组合输入，希望转移运营责任的客户购买可归因结果；A标准化扩张，B在责任清晰场景渐进发展</a:t>
                       </a:r>
                     </a:p>
                   </a:txBody>
@@ -13091,7 +12783,7 @@
                           <a:latin typeface="WenQuanYi Micro Hei"/>
                           <a:ea typeface="WenQuanYi Micro Hei"/>
                         </a:rPr>
-                        <a:t>若API增长而无消费者、收入和责任边界，商业链尚未成立；ISAC/数据空间付费规模仍取决于需求、隐私和制度</a:t>
+                        <a:t>A若只有API数量无持续收入则不成立；B若不能定义基线、归因、定责或回退则不能规模化；两条路径不得混算</a:t>
                       </a:r>
                     </a:p>
                   </a:txBody>
@@ -13242,7 +12934,7 @@
                 <a:latin typeface="WenQuanYi Micro Hei"/>
                 <a:ea typeface="WenQuanYi Micro Hei"/>
               </a:rPr>
-              <a:t>1–3年决策：先做可证伪底座。优先建立T2/T3事件和两级运行，再用T1/T6证明可复用、可验收；T4/T5从只读、建议、影子运行开始；T7只认真实付费、跨网一致和履约成本；T8以进入工作文本、参考实现和互操作测试为标准验证。</a:t>
+              <a:t>1–3年决策：先做可证伪底座。优先建立T2/T3事件和两级运行，再用T1/T6证明可复用、可验收；T4/T5从只读、建议、影子运行开始；T7-A看真实付费、跨网一致和履约成本，T7-B看基线、归因、责任和回滚；T8以进入工作文本、参考实现和互操作测试为标准验证。</a:t>
             </a:r>
           </a:p>
           <a:p>
